--- a/docs/proposals/softbank-ultraman-caravan/プランAB比較_ポケットスライド.pptx
+++ b/docs/proposals/softbank-ultraman-caravan/プランAB比較_ポケットスライド.pptx
@@ -3584,7 +3584,7 @@
                           <a:latin typeface="Meiryo"/>
                           <a:ea typeface="Meiryo"/>
                         </a:rPr>
-                        <a:t>ロイヤリティ保証</a:t>
+                        <a:t>作成物の最低数量</a:t>
                       </a:r>
                     </a:p>
                   </a:txBody>
@@ -3607,7 +3607,7 @@
                           <a:latin typeface="Meiryo"/>
                           <a:ea typeface="Meiryo"/>
                         </a:rPr>
-                        <a:t>なし</a:t>
+                        <a:t>なし(完全従量)</a:t>
                       </a:r>
                     </a:p>
                   </a:txBody>
@@ -3630,7 +3630,7 @@
                           <a:latin typeface="Meiryo"/>
                           <a:ea typeface="Meiryo"/>
                         </a:rPr>
-                        <a:t>年間1,000万円(実績が上回る場合は実績払い)</a:t>
+                        <a:t>キット400式・ノベルティ3,000セット/年(不足分は精算)</a:t>
                       </a:r>
                     </a:p>
                   </a:txBody>

--- a/docs/proposals/softbank-ultraman-caravan/プランAB比較_ポケットスライド.pptx
+++ b/docs/proposals/softbank-ultraman-caravan/プランAB比較_ポケットスライド.pptx
@@ -3630,7 +3630,7 @@
                           <a:latin typeface="Meiryo"/>
                           <a:ea typeface="Meiryo"/>
                         </a:rPr>
-                        <a:t>キット400式・ノベルティ3,000セット/年(不足分は精算)</a:t>
+                        <a:t>キット600式・ノベルティ3,000セット/年(不足分は精算)</a:t>
                       </a:r>
                     </a:p>
                   </a:txBody>

--- a/docs/proposals/softbank-ultraman-caravan/プランAB比較_ポケットスライド.pptx
+++ b/docs/proposals/softbank-ultraman-caravan/プランAB比較_ポケットスライド.pptx
@@ -3630,7 +3630,7 @@
                           <a:latin typeface="Meiryo"/>
                           <a:ea typeface="Meiryo"/>
                         </a:rPr>
-                        <a:t>キット600式・ノベルティ3,000セット/年(不足分は精算)</a:t>
+                        <a:t>キット600式・ノベルティ1.4万セット/年(不足分は精算)</a:t>
                       </a:r>
                     </a:p>
                   </a:txBody>
